--- a/exports/261029_dair_onderwijsdata/261029_dair_onderwijsdata.pptx
+++ b/exports/261029_dair_onderwijsdata/261029_dair_onderwijsdata.pptx
@@ -24339,7 +24339,29 @@
                 <a:ea typeface="General Sans Semibold" pitchFamily="34" charset="-122"/>
                 <a:cs typeface="General Sans Semibold" pitchFamily="34" charset="-120"/>
               </a:rPr>
-              <a:t>Spiegelmoment 2: is het te vertrouwen?</a:t>
+              <a:t>Spiegelmoment 2: is het rapport </a:t>
+            </a:r>
+            <a:r>
+              <a:rPr lang="en-US" sz="4800" dirty="0" err="1">
+                <a:solidFill>
+                  <a:srgbClr val="000000"/>
+                </a:solidFill>
+                <a:latin typeface="General Sans Semibold" pitchFamily="34" charset="0"/>
+                <a:ea typeface="General Sans Semibold" pitchFamily="34" charset="-122"/>
+                <a:cs typeface="General Sans Semibold" pitchFamily="34" charset="-120"/>
+              </a:rPr>
+              <a:t>compleet</a:t>
+            </a:r>
+            <a:r>
+              <a:rPr lang="en-US" sz="4800" dirty="0">
+                <a:solidFill>
+                  <a:srgbClr val="000000"/>
+                </a:solidFill>
+                <a:latin typeface="General Sans Semibold" pitchFamily="34" charset="0"/>
+                <a:ea typeface="General Sans Semibold" pitchFamily="34" charset="-122"/>
+                <a:cs typeface="General Sans Semibold" pitchFamily="34" charset="-120"/>
+              </a:rPr>
+              <a:t>?</a:t>
             </a:r>
             <a:endParaRPr lang="en-US" sz="4800" dirty="0"/>
           </a:p>
@@ -24381,7 +24403,117 @@
                 <a:ea typeface="Cooper Lt BT" pitchFamily="34" charset="-122"/>
                 <a:cs typeface="Cooper Lt BT" pitchFamily="34" charset="-120"/>
               </a:rPr>
-              <a:t>Wat klopte, wat niet, en waaraan zag je dat? Eerst aan tafel.</a:t>
+              <a:t>Wat mis je, wat </a:t>
+            </a:r>
+            <a:r>
+              <a:rPr lang="en-US" sz="2200" dirty="0" err="1">
+                <a:solidFill>
+                  <a:srgbClr val="000000"/>
+                </a:solidFill>
+                <a:latin typeface="Cooper Lt BT" pitchFamily="34" charset="0"/>
+                <a:ea typeface="Cooper Lt BT" pitchFamily="34" charset="-122"/>
+                <a:cs typeface="Cooper Lt BT" pitchFamily="34" charset="-120"/>
+              </a:rPr>
+              <a:t>kan</a:t>
+            </a:r>
+            <a:r>
+              <a:rPr lang="en-US" sz="2200" dirty="0">
+                <a:solidFill>
+                  <a:srgbClr val="000000"/>
+                </a:solidFill>
+                <a:latin typeface="Cooper Lt BT" pitchFamily="34" charset="0"/>
+                <a:ea typeface="Cooper Lt BT" pitchFamily="34" charset="-122"/>
+                <a:cs typeface="Cooper Lt BT" pitchFamily="34" charset="-120"/>
+              </a:rPr>
+              <a:t> </a:t>
+            </a:r>
+            <a:r>
+              <a:rPr lang="en-US" sz="2200" dirty="0" err="1">
+                <a:solidFill>
+                  <a:srgbClr val="000000"/>
+                </a:solidFill>
+                <a:latin typeface="Cooper Lt BT" pitchFamily="34" charset="0"/>
+                <a:ea typeface="Cooper Lt BT" pitchFamily="34" charset="-122"/>
+                <a:cs typeface="Cooper Lt BT" pitchFamily="34" charset="-120"/>
+              </a:rPr>
+              <a:t>beter</a:t>
+            </a:r>
+            <a:r>
+              <a:rPr lang="en-US" sz="2200" dirty="0">
+                <a:solidFill>
+                  <a:srgbClr val="000000"/>
+                </a:solidFill>
+                <a:latin typeface="Cooper Lt BT" pitchFamily="34" charset="0"/>
+                <a:ea typeface="Cooper Lt BT" pitchFamily="34" charset="-122"/>
+                <a:cs typeface="Cooper Lt BT" pitchFamily="34" charset="-120"/>
+              </a:rPr>
+              <a:t>? Zou je het </a:t>
+            </a:r>
+            <a:r>
+              <a:rPr lang="en-US" sz="2200" dirty="0" err="1">
+                <a:solidFill>
+                  <a:srgbClr val="000000"/>
+                </a:solidFill>
+                <a:latin typeface="Cooper Lt BT" pitchFamily="34" charset="0"/>
+                <a:ea typeface="Cooper Lt BT" pitchFamily="34" charset="-122"/>
+                <a:cs typeface="Cooper Lt BT" pitchFamily="34" charset="-120"/>
+              </a:rPr>
+              <a:t>doorsturen</a:t>
+            </a:r>
+            <a:r>
+              <a:rPr lang="en-US" sz="2200" dirty="0">
+                <a:solidFill>
+                  <a:srgbClr val="000000"/>
+                </a:solidFill>
+                <a:latin typeface="Cooper Lt BT" pitchFamily="34" charset="0"/>
+                <a:ea typeface="Cooper Lt BT" pitchFamily="34" charset="-122"/>
+                <a:cs typeface="Cooper Lt BT" pitchFamily="34" charset="-120"/>
+              </a:rPr>
+              <a:t> </a:t>
+            </a:r>
+            <a:r>
+              <a:rPr lang="en-US" sz="2200" dirty="0" err="1">
+                <a:solidFill>
+                  <a:srgbClr val="000000"/>
+                </a:solidFill>
+                <a:latin typeface="Cooper Lt BT" pitchFamily="34" charset="0"/>
+                <a:ea typeface="Cooper Lt BT" pitchFamily="34" charset="-122"/>
+                <a:cs typeface="Cooper Lt BT" pitchFamily="34" charset="-120"/>
+              </a:rPr>
+              <a:t>aan</a:t>
+            </a:r>
+            <a:r>
+              <a:rPr lang="en-US" sz="2200" dirty="0">
+                <a:solidFill>
+                  <a:srgbClr val="000000"/>
+                </a:solidFill>
+                <a:latin typeface="Cooper Lt BT" pitchFamily="34" charset="0"/>
+                <a:ea typeface="Cooper Lt BT" pitchFamily="34" charset="-122"/>
+                <a:cs typeface="Cooper Lt BT" pitchFamily="34" charset="-120"/>
+              </a:rPr>
+              <a:t> </a:t>
+            </a:r>
+            <a:r>
+              <a:rPr lang="en-US" sz="2200" dirty="0" err="1">
+                <a:solidFill>
+                  <a:srgbClr val="000000"/>
+                </a:solidFill>
+                <a:latin typeface="Cooper Lt BT" pitchFamily="34" charset="0"/>
+                <a:ea typeface="Cooper Lt BT" pitchFamily="34" charset="-122"/>
+                <a:cs typeface="Cooper Lt BT" pitchFamily="34" charset="-120"/>
+              </a:rPr>
+              <a:t>collega</a:t>
+            </a:r>
+            <a:r>
+              <a:rPr lang="en-US" sz="2200" dirty="0">
+                <a:solidFill>
+                  <a:srgbClr val="000000"/>
+                </a:solidFill>
+                <a:latin typeface="Cooper Lt BT" pitchFamily="34" charset="0"/>
+                <a:ea typeface="Cooper Lt BT" pitchFamily="34" charset="-122"/>
+                <a:cs typeface="Cooper Lt BT" pitchFamily="34" charset="-120"/>
+              </a:rPr>
+              <a:t>?</a:t>
             </a:r>
             <a:endParaRPr lang="en-US" sz="2200" dirty="0"/>
           </a:p>
@@ -29656,7 +29788,7 @@
         <p:spPr>
           <a:xfrm>
             <a:off x="548640" y="4267962"/>
-            <a:ext cx="11094415" cy="457200"/>
+            <a:ext cx="11207669" cy="457200"/>
           </a:xfrm>
           <a:prstGeom prst="rect">
             <a:avLst/>
@@ -29668,11 +29800,10 @@
           <a:bodyPr wrap="square" lIns="0" tIns="0" rIns="0" bIns="0" rtlCol="0" anchor="t"/>
           <a:lstStyle/>
           <a:p>
-            <a:pPr marL="0" indent="0" algn="l">
+            <a:pPr>
               <a:lnSpc>
                 <a:spcPct val="105000"/>
               </a:lnSpc>
-              <a:buNone/>
             </a:pPr>
             <a:r>
               <a:rPr lang="en-US" sz="1800" dirty="0" err="1">
@@ -29760,18 +29891,21 @@
                 <a:ea typeface="General Sans Semibold" pitchFamily="34" charset="-122"/>
                 <a:cs typeface="General Sans Semibold" pitchFamily="34" charset="-120"/>
               </a:rPr>
-              <a:t>. </a:t>
+              <a:t>. 		</a:t>
             </a:r>
-          </a:p>
-          <a:p>
-            <a:pPr marL="0" indent="0" algn="r">
-              <a:lnSpc>
-                <a:spcPct val="105000"/>
-              </a:lnSpc>
-              <a:buNone/>
-            </a:pPr>
             <a:r>
-              <a:rPr lang="en-US" sz="1800" dirty="0" err="1">
+              <a:rPr lang="en-US" sz="1800">
+                <a:solidFill>
+                  <a:srgbClr val="3D68EC"/>
+                </a:solidFill>
+                <a:latin typeface="General Sans Semibold" pitchFamily="34" charset="0"/>
+                <a:ea typeface="General Sans Semibold" pitchFamily="34" charset="-122"/>
+                <a:cs typeface="General Sans Semibold" pitchFamily="34" charset="-120"/>
+              </a:rPr>
+              <a:t> </a:t>
+            </a:r>
+            <a:r>
+              <a:rPr lang="en-US">
                 <a:solidFill>
                   <a:schemeClr val="accent2"/>
                 </a:solidFill>
@@ -29779,10 +29913,10 @@
                 <a:ea typeface="General Sans Semibold" pitchFamily="34" charset="-122"/>
                 <a:cs typeface="General Sans Semibold" pitchFamily="34" charset="-120"/>
               </a:rPr>
-              <a:t>Niet</a:t>
+              <a:t>Maar </a:t>
             </a:r>
             <a:r>
-              <a:rPr lang="en-US" sz="1800" dirty="0">
+              <a:rPr lang="en-US" dirty="0" err="1">
                 <a:solidFill>
                   <a:schemeClr val="accent2"/>
                 </a:solidFill>
@@ -29790,10 +29924,65 @@
                 <a:ea typeface="General Sans Semibold" pitchFamily="34" charset="-122"/>
                 <a:cs typeface="General Sans Semibold" pitchFamily="34" charset="-120"/>
               </a:rPr>
-              <a:t> elke vraag </a:t>
+              <a:t>niet</a:t>
             </a:r>
             <a:r>
-              <a:rPr lang="en-US" sz="1800" dirty="0" err="1">
+              <a:rPr lang="en-US" dirty="0">
+                <a:solidFill>
+                  <a:schemeClr val="accent2"/>
+                </a:solidFill>
+                <a:latin typeface="General Sans Semibold" pitchFamily="34" charset="0"/>
+                <a:ea typeface="General Sans Semibold" pitchFamily="34" charset="-122"/>
+                <a:cs typeface="General Sans Semibold" pitchFamily="34" charset="-120"/>
+              </a:rPr>
+              <a:t> </a:t>
+            </a:r>
+            <a:r>
+              <a:rPr lang="en-US" dirty="0" err="1">
+                <a:solidFill>
+                  <a:schemeClr val="accent2"/>
+                </a:solidFill>
+                <a:latin typeface="General Sans Semibold" pitchFamily="34" charset="0"/>
+                <a:ea typeface="General Sans Semibold" pitchFamily="34" charset="-122"/>
+                <a:cs typeface="General Sans Semibold" pitchFamily="34" charset="-120"/>
+              </a:rPr>
+              <a:t>elke</a:t>
+            </a:r>
+            <a:r>
+              <a:rPr lang="en-US" dirty="0">
+                <a:solidFill>
+                  <a:schemeClr val="accent2"/>
+                </a:solidFill>
+                <a:latin typeface="General Sans Semibold" pitchFamily="34" charset="0"/>
+                <a:ea typeface="General Sans Semibold" pitchFamily="34" charset="-122"/>
+                <a:cs typeface="General Sans Semibold" pitchFamily="34" charset="-120"/>
+              </a:rPr>
+              <a:t> </a:t>
+            </a:r>
+            <a:r>
+              <a:rPr lang="en-US" dirty="0" err="1">
+                <a:solidFill>
+                  <a:schemeClr val="accent2"/>
+                </a:solidFill>
+                <a:latin typeface="General Sans Semibold" pitchFamily="34" charset="0"/>
+                <a:ea typeface="General Sans Semibold" pitchFamily="34" charset="-122"/>
+                <a:cs typeface="General Sans Semibold" pitchFamily="34" charset="-120"/>
+              </a:rPr>
+              <a:t>vraag</a:t>
+            </a:r>
+            <a:r>
+              <a:rPr lang="en-US" dirty="0">
+                <a:solidFill>
+                  <a:schemeClr val="accent2"/>
+                </a:solidFill>
+                <a:latin typeface="General Sans Semibold" pitchFamily="34" charset="0"/>
+                <a:ea typeface="General Sans Semibold" pitchFamily="34" charset="-122"/>
+                <a:cs typeface="General Sans Semibold" pitchFamily="34" charset="-120"/>
+              </a:rPr>
+              <a:t> </a:t>
+            </a:r>
+            <a:r>
+              <a:rPr lang="en-US" dirty="0" err="1">
                 <a:solidFill>
                   <a:schemeClr val="accent2"/>
                 </a:solidFill>
@@ -29804,7 +29993,7 @@
               <a:t>wordt</a:t>
             </a:r>
             <a:r>
-              <a:rPr lang="en-US" sz="1800" dirty="0">
+              <a:rPr lang="en-US" dirty="0">
                 <a:solidFill>
                   <a:schemeClr val="accent2"/>
                 </a:solidFill>
@@ -29815,7 +30004,7 @@
               <a:t> </a:t>
             </a:r>
             <a:r>
-              <a:rPr lang="en-US" sz="1800" dirty="0" err="1">
+              <a:rPr lang="en-US" dirty="0" err="1">
                 <a:solidFill>
                   <a:schemeClr val="accent2"/>
                 </a:solidFill>
@@ -29826,7 +30015,7 @@
               <a:t>een</a:t>
             </a:r>
             <a:r>
-              <a:rPr lang="en-US" sz="1800" dirty="0">
+              <a:rPr lang="en-US" dirty="0">
                 <a:solidFill>
                   <a:schemeClr val="accent2"/>
                 </a:solidFill>
@@ -29837,7 +30026,7 @@
               <a:t> tab in </a:t>
             </a:r>
             <a:r>
-              <a:rPr lang="en-US" sz="1800" dirty="0" err="1">
+              <a:rPr lang="en-US" dirty="0" err="1">
                 <a:solidFill>
                   <a:schemeClr val="accent2"/>
                 </a:solidFill>
@@ -29848,6 +30037,33 @@
               <a:t>een</a:t>
             </a:r>
             <a:r>
+              <a:rPr lang="en-US" dirty="0">
+                <a:solidFill>
+                  <a:schemeClr val="accent2"/>
+                </a:solidFill>
+                <a:latin typeface="General Sans Semibold" pitchFamily="34" charset="0"/>
+                <a:ea typeface="General Sans Semibold" pitchFamily="34" charset="-122"/>
+                <a:cs typeface="General Sans Semibold" pitchFamily="34" charset="-120"/>
+              </a:rPr>
+              <a:t> dashboard</a:t>
+            </a:r>
+            <a:endParaRPr lang="en-US" sz="1800" dirty="0">
+              <a:solidFill>
+                <a:srgbClr val="3D68EC"/>
+              </a:solidFill>
+              <a:latin typeface="General Sans Semibold" pitchFamily="34" charset="0"/>
+              <a:ea typeface="General Sans Semibold" pitchFamily="34" charset="-122"/>
+              <a:cs typeface="General Sans Semibold" pitchFamily="34" charset="-120"/>
+            </a:endParaRPr>
+          </a:p>
+          <a:p>
+            <a:pPr marL="0" indent="0" algn="r">
+              <a:lnSpc>
+                <a:spcPct val="105000"/>
+              </a:lnSpc>
+              <a:buNone/>
+            </a:pPr>
+            <a:r>
               <a:rPr lang="en-US" sz="1800" dirty="0">
                 <a:solidFill>
                   <a:schemeClr val="accent2"/>
@@ -29856,7 +30072,7 @@
                 <a:ea typeface="General Sans Semibold" pitchFamily="34" charset="-122"/>
                 <a:cs typeface="General Sans Semibold" pitchFamily="34" charset="-120"/>
               </a:rPr>
-              <a:t> dashboard.</a:t>
+              <a:t>.</a:t>
             </a:r>
             <a:r>
               <a:rPr lang="en-US" sz="1800" dirty="0">

--- a/exports/261029_dair_onderwijsdata/261029_dair_onderwijsdata.pptx
+++ b/exports/261029_dair_onderwijsdata/261029_dair_onderwijsdata.pptx
@@ -1,6 +1,6 @@
 
 <file path=ppt/presentation.xml><?xml version="1.0" encoding="utf-8"?>
-<p:presentation xmlns:a="http://schemas.openxmlformats.org/drawingml/2006/main" xmlns:r="http://schemas.openxmlformats.org/officeDocument/2006/relationships" xmlns:p="http://schemas.openxmlformats.org/presentationml/2006/main" saveSubsetFonts="1" autoCompressPictures="0">
+<p:presentation xmlns:a="http://schemas.openxmlformats.org/drawingml/2006/main" xmlns:r="http://schemas.openxmlformats.org/officeDocument/2006/relationships" xmlns:p="http://schemas.openxmlformats.org/presentationml/2006/main" saveSubsetFonts="true" autoCompressPictures="0" embedTrueTypeFonts="true">
   <p:sldMasterIdLst>
     <p:sldMasterId id="2147483648" r:id="rId1"/>
   </p:sldMasterIdLst>
@@ -34,6 +34,20 @@
   </p:notesMasterIdLst>
   <p:sldSz cx="12192000" cy="6858000"/>
   <p:notesSz cx="6858000" cy="12192000"/>
+  <p:embeddedFontLst>
+    <p:embeddedFont>
+      <p:font typeface="General Sans"/>
+      <p:regular r:id="rId201314"/>
+    </p:embeddedFont>
+    <p:embeddedFont>
+      <p:font typeface="General Sans Semibold"/>
+      <p:regular r:id="rId201315"/>
+    </p:embeddedFont>
+    <p:embeddedFont>
+      <p:font typeface="Cooper Lt BT"/>
+      <p:regular r:id="rId201316"/>
+    </p:embeddedFont>
+  </p:embeddedFontLst>
   <p:defaultTextStyle>
     <a:lvl1pPr marL="0" algn="l" defTabSz="914400" rtl="0" eaLnBrk="1" latinLnBrk="0" hangingPunct="1">
       <a:defRPr sz="1800" kern="1200">
